--- a/AI-Creator-Lab-Deck.pptx
+++ b/AI-Creator-Lab-Deck.pptx
@@ -4005,11 +4005,11 @@
         <p:spPr>
           <a:xfrm>
             <a:off x="5080099" y="1498402"/>
-            <a:ext cx="3555950" cy="1072902"/>
+            <a:ext cx="3555950" cy="1225302"/>
           </a:xfrm>
           <a:prstGeom prst="roundRect">
             <a:avLst>
-              <a:gd name="adj" fmla="val 9470"/>
+              <a:gd name="adj" fmla="val 8292"/>
             </a:avLst>
           </a:prstGeom>
           <a:solidFill>
@@ -4083,7 +4083,7 @@
         <p:spPr>
           <a:xfrm>
             <a:off x="5276850" y="1942802"/>
-            <a:ext cx="3225698" cy="304800"/>
+            <a:ext cx="3225698" cy="457200"/>
           </a:xfrm>
           <a:prstGeom prst="rect">
             <a:avLst/>
@@ -4110,7 +4110,7 @@
                 <a:ea typeface="Arial" pitchFamily="34" charset="-122"/>
                 <a:cs typeface="Arial" pitchFamily="34" charset="-120"/>
               </a:rPr>
-              <a:t>"upbeat hip-hop song about graduating, confident vocals, 808 bass"</a:t>
+              <a:t>"upbeat hip-hop anthem about a young African American man graduating, confident vocals, 808 bass, celebratory vibe"</a:t>
             </a:r>
             <a:endParaRPr lang="en-US" sz="1100" dirty="0"/>
           </a:p>
@@ -4124,7 +4124,7 @@
         </p:nvSpPr>
         <p:spPr>
           <a:xfrm>
-            <a:off x="5080099" y="2672804"/>
+            <a:off x="5080099" y="2825204"/>
             <a:ext cx="3627069" cy="152400"/>
           </a:xfrm>
           <a:prstGeom prst="rect">
@@ -4416,11 +4416,11 @@
         <p:spPr>
           <a:xfrm>
             <a:off x="5080099" y="1498402"/>
-            <a:ext cx="3555950" cy="945952"/>
+            <a:ext cx="3555950" cy="1098352"/>
           </a:xfrm>
           <a:prstGeom prst="roundRect">
             <a:avLst>
-              <a:gd name="adj" fmla="val 10741"/>
+              <a:gd name="adj" fmla="val 9250"/>
             </a:avLst>
           </a:prstGeom>
           <a:solidFill>
@@ -4494,7 +4494,7 @@
         <p:spPr>
           <a:xfrm>
             <a:off x="5276850" y="1942802"/>
-            <a:ext cx="3225698" cy="304800"/>
+            <a:ext cx="3225698" cy="457200"/>
           </a:xfrm>
           <a:prstGeom prst="rect">
             <a:avLst/>
@@ -4518,7 +4518,7 @@
                 <a:ea typeface="Arial" pitchFamily="34" charset="-122"/>
                 <a:cs typeface="Arial" pitchFamily="34" charset="-120"/>
               </a:rPr>
-              <a:t>"photorealistic image of a student studying with holographic notes floating around them"</a:t>
+              <a:t>"photorealistic image of an African American woman studying with holographic notes floating around her, futuristic library setting"</a:t>
             </a:r>
             <a:endParaRPr lang="en-US" sz="1100" dirty="0"/>
           </a:p>
@@ -4785,11 +4785,11 @@
         <p:spPr>
           <a:xfrm>
             <a:off x="5080099" y="1498402"/>
-            <a:ext cx="3555950" cy="945952"/>
+            <a:ext cx="3555950" cy="1250752"/>
           </a:xfrm>
           <a:prstGeom prst="roundRect">
             <a:avLst>
-              <a:gd name="adj" fmla="val 10741"/>
+              <a:gd name="adj" fmla="val 8123"/>
             </a:avLst>
           </a:prstGeom>
           <a:solidFill>
@@ -4863,7 +4863,7 @@
         <p:spPr>
           <a:xfrm>
             <a:off x="5276850" y="1942802"/>
-            <a:ext cx="3225698" cy="304800"/>
+            <a:ext cx="3225698" cy="609600"/>
           </a:xfrm>
           <a:prstGeom prst="rect">
             <a:avLst/>
@@ -4887,7 +4887,7 @@
                 <a:ea typeface="Arial" pitchFamily="34" charset="-122"/>
                 <a:cs typeface="Arial" pitchFamily="34" charset="-120"/>
               </a:rPr>
-              <a:t>Use your storyboard sketch from the Creator Blueprint!</a:t>
+              <a:t>Use your storyboard sketch from the Creator Blueprint! Search stock footage for "African American students" or "Black excellence" to find representative clips.</a:t>
             </a:r>
             <a:endParaRPr lang="en-US" sz="1100" dirty="0"/>
           </a:p>
@@ -5006,11 +5006,11 @@
         <p:spPr>
           <a:xfrm>
             <a:off x="381000" y="980926"/>
-            <a:ext cx="8382000" cy="580727"/>
+            <a:ext cx="8382000" cy="733127"/>
           </a:xfrm>
           <a:prstGeom prst="roundRect">
             <a:avLst>
-              <a:gd name="adj" fmla="val 13121"/>
+              <a:gd name="adj" fmla="val 10394"/>
             </a:avLst>
           </a:prstGeom>
           <a:solidFill>
@@ -5038,7 +5038,7 @@
         <p:spPr>
           <a:xfrm>
             <a:off x="404813" y="980926"/>
-            <a:ext cx="0" cy="580727"/>
+            <a:ext cx="0" cy="733127"/>
           </a:xfrm>
           <a:prstGeom prst="line">
             <a:avLst/>
@@ -5060,7 +5060,7 @@
         </p:nvSpPr>
         <p:spPr>
           <a:xfrm>
-            <a:off x="606326" y="1093440"/>
+            <a:off x="606326" y="1169640"/>
             <a:ext cx="355550" cy="355550"/>
           </a:xfrm>
           <a:prstGeom prst="roundRect">
@@ -5092,7 +5092,7 @@
         </p:nvSpPr>
         <p:spPr>
           <a:xfrm>
-            <a:off x="733626" y="1166366"/>
+            <a:off x="733626" y="1242566"/>
             <a:ext cx="100950" cy="209550"/>
           </a:xfrm>
           <a:prstGeom prst="rect">
@@ -5174,7 +5174,7 @@
         <p:spPr>
           <a:xfrm>
             <a:off x="1114276" y="1307753"/>
-            <a:ext cx="7620444" cy="152400"/>
+            <a:ext cx="7620444" cy="304800"/>
           </a:xfrm>
           <a:prstGeom prst="rect">
             <a:avLst/>
@@ -5198,7 +5198,7 @@
                 <a:ea typeface="Arial" pitchFamily="34" charset="-122"/>
                 <a:cs typeface="Arial" pitchFamily="34" charset="-120"/>
               </a:rPr>
-              <a:t>Don't say "make a song." Say "upbeat pop song about summer, female vocals, 120 BPM"</a:t>
+              <a:t>Don't say "make a song." Say "upbeat R&amp;B song about an African American woman chasing her dreams, soulful vocals, 90 BPM"</a:t>
             </a:r>
             <a:endParaRPr lang="en-US" sz="1100" dirty="0"/>
           </a:p>
@@ -5212,7 +5212,7 @@
         </p:nvSpPr>
         <p:spPr>
           <a:xfrm>
-            <a:off x="381000" y="1663154"/>
+            <a:off x="381000" y="1815554"/>
             <a:ext cx="8382000" cy="580727"/>
           </a:xfrm>
           <a:prstGeom prst="roundRect">
@@ -5244,7 +5244,7 @@
         </p:nvSpPr>
         <p:spPr>
           <a:xfrm>
-            <a:off x="404813" y="1663154"/>
+            <a:off x="404813" y="1815554"/>
             <a:ext cx="0" cy="580727"/>
           </a:xfrm>
           <a:prstGeom prst="line">
@@ -5267,7 +5267,7 @@
         </p:nvSpPr>
         <p:spPr>
           <a:xfrm>
-            <a:off x="606326" y="1775668"/>
+            <a:off x="606326" y="1928068"/>
             <a:ext cx="355550" cy="355550"/>
           </a:xfrm>
           <a:prstGeom prst="roundRect">
@@ -5299,7 +5299,7 @@
         </p:nvSpPr>
         <p:spPr>
           <a:xfrm>
-            <a:off x="733626" y="1848594"/>
+            <a:off x="733626" y="2000994"/>
             <a:ext cx="100950" cy="209550"/>
           </a:xfrm>
           <a:prstGeom prst="rect">
@@ -5338,7 +5338,7 @@
         </p:nvSpPr>
         <p:spPr>
           <a:xfrm>
-            <a:off x="1114276" y="1764655"/>
+            <a:off x="1114276" y="1917055"/>
             <a:ext cx="7620444" cy="200025"/>
           </a:xfrm>
           <a:prstGeom prst="rect">
@@ -5380,7 +5380,7 @@
         </p:nvSpPr>
         <p:spPr>
           <a:xfrm>
-            <a:off x="1114276" y="1989981"/>
+            <a:off x="1114276" y="2142381"/>
             <a:ext cx="7620444" cy="152400"/>
           </a:xfrm>
           <a:prstGeom prst="rect">
@@ -5405,7 +5405,7 @@
                 <a:ea typeface="Arial" pitchFamily="34" charset="-122"/>
                 <a:cs typeface="Arial" pitchFamily="34" charset="-120"/>
               </a:rPr>
-              <a:t>Add mood words: dreamy, energetic, dark, nostalgic</a:t>
+              <a:t>Add mood words: dreamy, energetic, dark, nostalgic, empowering</a:t>
             </a:r>
             <a:endParaRPr lang="en-US" sz="1100" dirty="0"/>
           </a:p>
@@ -5419,7 +5419,7 @@
         </p:nvSpPr>
         <p:spPr>
           <a:xfrm>
-            <a:off x="381000" y="2345382"/>
+            <a:off x="381000" y="2497782"/>
             <a:ext cx="8382000" cy="580727"/>
           </a:xfrm>
           <a:prstGeom prst="roundRect">
@@ -5451,7 +5451,7 @@
         </p:nvSpPr>
         <p:spPr>
           <a:xfrm>
-            <a:off x="404813" y="2345382"/>
+            <a:off x="404813" y="2497782"/>
             <a:ext cx="0" cy="580727"/>
           </a:xfrm>
           <a:prstGeom prst="line">
@@ -5474,7 +5474,7 @@
         </p:nvSpPr>
         <p:spPr>
           <a:xfrm>
-            <a:off x="606326" y="2457896"/>
+            <a:off x="606326" y="2610296"/>
             <a:ext cx="355550" cy="355550"/>
           </a:xfrm>
           <a:prstGeom prst="roundRect">
@@ -5506,7 +5506,7 @@
         </p:nvSpPr>
         <p:spPr>
           <a:xfrm>
-            <a:off x="733626" y="2530822"/>
+            <a:off x="733626" y="2683222"/>
             <a:ext cx="100950" cy="209550"/>
           </a:xfrm>
           <a:prstGeom prst="rect">
@@ -5545,7 +5545,7 @@
         </p:nvSpPr>
         <p:spPr>
           <a:xfrm>
-            <a:off x="1114276" y="2446883"/>
+            <a:off x="1114276" y="2599283"/>
             <a:ext cx="7620444" cy="200025"/>
           </a:xfrm>
           <a:prstGeom prst="rect">
@@ -5587,7 +5587,7 @@
         </p:nvSpPr>
         <p:spPr>
           <a:xfrm>
-            <a:off x="1114276" y="2672209"/>
+            <a:off x="1114276" y="2824609"/>
             <a:ext cx="7620444" cy="152400"/>
           </a:xfrm>
           <a:prstGeom prst="rect">
@@ -5626,7 +5626,7 @@
         </p:nvSpPr>
         <p:spPr>
           <a:xfrm>
-            <a:off x="381000" y="3027611"/>
+            <a:off x="381000" y="3180011"/>
             <a:ext cx="8382000" cy="580727"/>
           </a:xfrm>
           <a:prstGeom prst="roundRect">
@@ -5658,7 +5658,7 @@
         </p:nvSpPr>
         <p:spPr>
           <a:xfrm>
-            <a:off x="404813" y="3027611"/>
+            <a:off x="404813" y="3180011"/>
             <a:ext cx="0" cy="580727"/>
           </a:xfrm>
           <a:prstGeom prst="line">
@@ -5681,7 +5681,7 @@
         </p:nvSpPr>
         <p:spPr>
           <a:xfrm>
-            <a:off x="606326" y="3140125"/>
+            <a:off x="606326" y="3292525"/>
             <a:ext cx="355550" cy="355550"/>
           </a:xfrm>
           <a:prstGeom prst="roundRect">
@@ -5713,7 +5713,7 @@
         </p:nvSpPr>
         <p:spPr>
           <a:xfrm>
-            <a:off x="733626" y="3213050"/>
+            <a:off x="733626" y="3365450"/>
             <a:ext cx="100950" cy="209550"/>
           </a:xfrm>
           <a:prstGeom prst="rect">
@@ -5752,7 +5752,7 @@
         </p:nvSpPr>
         <p:spPr>
           <a:xfrm>
-            <a:off x="1114276" y="3129111"/>
+            <a:off x="1114276" y="3281511"/>
             <a:ext cx="7620444" cy="200025"/>
           </a:xfrm>
           <a:prstGeom prst="rect">
@@ -5794,7 +5794,7 @@
         </p:nvSpPr>
         <p:spPr>
           <a:xfrm>
-            <a:off x="1114276" y="3354437"/>
+            <a:off x="1114276" y="3506837"/>
             <a:ext cx="7620444" cy="152400"/>
           </a:xfrm>
           <a:prstGeom prst="rect">
@@ -5833,7 +5833,7 @@
         </p:nvSpPr>
         <p:spPr>
           <a:xfrm>
-            <a:off x="381000" y="3709839"/>
+            <a:off x="381000" y="3862239"/>
             <a:ext cx="8382000" cy="580727"/>
           </a:xfrm>
           <a:prstGeom prst="roundRect">
@@ -5865,7 +5865,7 @@
         </p:nvSpPr>
         <p:spPr>
           <a:xfrm>
-            <a:off x="404813" y="3709839"/>
+            <a:off x="404813" y="3862239"/>
             <a:ext cx="0" cy="580727"/>
           </a:xfrm>
           <a:prstGeom prst="line">
@@ -5888,7 +5888,7 @@
         </p:nvSpPr>
         <p:spPr>
           <a:xfrm>
-            <a:off x="606326" y="3822353"/>
+            <a:off x="606326" y="3974753"/>
             <a:ext cx="355550" cy="355550"/>
           </a:xfrm>
           <a:prstGeom prst="roundRect">
@@ -5920,7 +5920,7 @@
         </p:nvSpPr>
         <p:spPr>
           <a:xfrm>
-            <a:off x="733626" y="3895279"/>
+            <a:off x="733626" y="4047679"/>
             <a:ext cx="100950" cy="209550"/>
           </a:xfrm>
           <a:prstGeom prst="rect">
@@ -5959,7 +5959,7 @@
         </p:nvSpPr>
         <p:spPr>
           <a:xfrm>
-            <a:off x="1114276" y="3811339"/>
+            <a:off x="1114276" y="3963739"/>
             <a:ext cx="7620444" cy="200025"/>
           </a:xfrm>
           <a:prstGeom prst="rect">
@@ -6001,7 +6001,7 @@
         </p:nvSpPr>
         <p:spPr>
           <a:xfrm>
-            <a:off x="1114276" y="4036665"/>
+            <a:off x="1114276" y="4189065"/>
             <a:ext cx="7620444" cy="152400"/>
           </a:xfrm>
           <a:prstGeom prst="rect">
